--- a/토스페이먼츠_결제경로.pptx
+++ b/토스페이먼츠_결제경로.pptx
@@ -12,6 +12,8 @@
     <p:sldId id="260" r:id="rId11"/>
     <p:sldId id="261" r:id="rId12"/>
     <p:sldId id="262" r:id="rId13"/>
+    <p:sldId id="263" r:id="rId14"/>
+    <p:sldId id="264" r:id="rId15"/>
   </p:sldIdLst>
   <p:sldSz cx="12191695" cy="6858000" type="screen4x3"/>
   <p:notesSz cx="6858000" cy="9144000"/>
@@ -3405,7 +3407,7 @@
                 </a:solidFill>
                 <a:latin typeface="Apple SD Gothic Neo"/>
               </a:rPr>
-              <a:t>② 요금 안내</a:t>
+              <a:t>② 사업자 정보 (홈페이지 하단)</a:t>
             </a:r>
           </a:p>
         </p:txBody>
@@ -3440,7 +3442,7 @@
                 </a:solidFill>
                 <a:latin typeface="Apple SD Gothic Neo"/>
               </a:rPr>
-              <a:t>dnalabs.kr/reservice</a:t>
+              <a:t>dnalabs.kr — 홈페이지 하단</a:t>
             </a:r>
           </a:p>
         </p:txBody>
@@ -3475,14 +3477,14 @@
                 </a:solidFill>
                 <a:latin typeface="Apple SD Gothic Neo"/>
               </a:rPr>
-              <a:t>서비스 개수와 인원에 따른 월 요금을 공개합니다. 부가세 별도임을 함께 적습니다.</a:t>
+              <a:t>상호·대표자·사업자등록번호·통신판매업신고번호·사업장 주소·대표번호·이메일·개인정보 보호책임자와 이용약관·개인정보 처리방침·환불정책 링크를 홈페이지와 서비스 안내·요금·가입(결제) 화면 하단에 표시합니다.</a:t>
             </a:r>
           </a:p>
         </p:txBody>
       </p:sp>
       <p:pic>
         <p:nvPicPr>
-          <p:cNvPr id="5" name="Picture 4" descr="2-요금안내.png"/>
+          <p:cNvPr id="5" name="Picture 4" descr="1b-사업자정보.png"/>
           <p:cNvPicPr>
             <a:picLocks noChangeAspect="1"/>
           </p:cNvPicPr>
@@ -3496,8 +3498,8 @@
         </p:blipFill>
         <p:spPr>
           <a:xfrm>
-            <a:off x="2779623" y="1234440"/>
-            <a:ext cx="6632448" cy="4663440"/>
+            <a:off x="1361296" y="1234440"/>
+            <a:ext cx="9469103" cy="4663440"/>
           </a:xfrm>
           <a:prstGeom prst="rect">
             <a:avLst/>
@@ -3552,7 +3554,7 @@
                 </a:solidFill>
                 <a:latin typeface="Apple SD Gothic Neo"/>
               </a:rPr>
-              <a:t>③ 요금제 선택</a:t>
+              <a:t>③ 요금 안내</a:t>
             </a:r>
           </a:p>
         </p:txBody>
@@ -3587,7 +3589,7 @@
                 </a:solidFill>
                 <a:latin typeface="Apple SD Gothic Neo"/>
               </a:rPr>
-              <a:t>dnalabs.kr/signup</a:t>
+              <a:t>dnalabs.kr/reservice</a:t>
             </a:r>
           </a:p>
         </p:txBody>
@@ -3622,14 +3624,14 @@
                 </a:solidFill>
                 <a:latin typeface="Apple SD Gothic Neo"/>
               </a:rPr>
-              <a:t>업종을 고른 뒤 요금제를 고릅니다. 고른 요금제의 월 금액과 첫 청구 시점을 그 자리에서 보여 줍니다.</a:t>
+              <a:t>서비스와 인원 구간에 따른 월 요금을 공개합니다. 부가세 별도임을 함께 적습니다.</a:t>
             </a:r>
           </a:p>
         </p:txBody>
       </p:sp>
       <p:pic>
         <p:nvPicPr>
-          <p:cNvPr id="5" name="Picture 4" descr="3-요금제선택.png"/>
+          <p:cNvPr id="5" name="Picture 4" descr="2-요금안내.png"/>
           <p:cNvPicPr>
             <a:picLocks noChangeAspect="1"/>
           </p:cNvPicPr>
@@ -3699,7 +3701,7 @@
                 </a:solidFill>
                 <a:latin typeface="Apple SD Gothic Neo"/>
               </a:rPr>
-              <a:t>④ 가입 정보 입력</a:t>
+              <a:t>④ 요금제 선택</a:t>
             </a:r>
           </a:p>
         </p:txBody>
@@ -3769,14 +3771,14 @@
                 </a:solidFill>
                 <a:latin typeface="Apple SD Gothic Neo"/>
               </a:rPr>
-              <a:t>상호·담당자·이메일·연락처를 받습니다. 다음 화면에서 이용약관·개인정보·환불정책에 동의를 받습니다.</a:t>
+              <a:t>업종을 고른 뒤 요금제를 고릅니다. 고른 요금제의 월 금액과 첫 청구 시점을 그 자리에서 보여 줍니다.</a:t>
             </a:r>
           </a:p>
         </p:txBody>
       </p:sp>
       <p:pic>
         <p:nvPicPr>
-          <p:cNvPr id="5" name="Picture 4" descr="4-정보입력.png"/>
+          <p:cNvPr id="5" name="Picture 4" descr="3-요금제선택.png"/>
           <p:cNvPicPr>
             <a:picLocks noChangeAspect="1"/>
           </p:cNvPicPr>
@@ -3846,7 +3848,7 @@
                 </a:solidFill>
                 <a:latin typeface="Apple SD Gothic Neo"/>
               </a:rPr>
-              <a:t>⑤ 토스페이먼츠 결제창</a:t>
+              <a:t>⑤ 가입 정보 입력</a:t>
             </a:r>
           </a:p>
         </p:txBody>
@@ -3881,7 +3883,7 @@
                 </a:solidFill>
                 <a:latin typeface="Apple SD Gothic Neo"/>
               </a:rPr>
-              <a:t>js.tosspayments.com</a:t>
+              <a:t>dnalabs.kr/signup</a:t>
             </a:r>
           </a:p>
         </p:txBody>
@@ -3916,14 +3918,14 @@
                 </a:solidFill>
                 <a:latin typeface="Apple SD Gothic Neo"/>
               </a:rPr>
-              <a:t>카드 정보는 토스페이먼츠 결제창에서만 입력받습니다. 당사는 카드번호를 받지도, 저장하지도 않습니다. 빌링키만 돌려받습니다.</a:t>
+              <a:t>상호·담당자·이메일·연락처를 받습니다. 다음 화면에서 이용약관·개인정보·환불정책에 동의를 받습니다.</a:t>
             </a:r>
           </a:p>
         </p:txBody>
       </p:sp>
       <p:pic>
         <p:nvPicPr>
-          <p:cNvPr id="5" name="Picture 4" descr="5-토스결제창.png"/>
+          <p:cNvPr id="5" name="Picture 4" descr="4-정보입력.png"/>
           <p:cNvPicPr>
             <a:picLocks noChangeAspect="1"/>
           </p:cNvPicPr>
@@ -3993,7 +3995,301 @@
                 </a:solidFill>
                 <a:latin typeface="Apple SD Gothic Neo"/>
               </a:rPr>
-              <a:t>⑥ 가입 완료</a:t>
+              <a:t>⑥ 결제 직전 화면 (하단)</a:t>
+            </a:r>
+          </a:p>
+        </p:txBody>
+      </p:sp>
+      <p:sp>
+        <p:nvSpPr>
+          <p:cNvPr id="3" name="TextBox 2"/>
+          <p:cNvSpPr txBox="1"/>
+          <p:nvPr/>
+        </p:nvSpPr>
+        <p:spPr>
+          <a:xfrm>
+            <a:off x="566928" y="841248"/>
+            <a:ext cx="8686800" cy="320040"/>
+          </a:xfrm>
+          <a:prstGeom prst="rect">
+            <a:avLst/>
+          </a:prstGeom>
+          <a:noFill/>
+        </p:spPr>
+        <p:txBody>
+          <a:bodyPr wrap="square" lIns="0" rIns="0" tIns="0" bIns="0">
+            <a:spAutoFit/>
+          </a:bodyPr>
+          <a:lstStyle/>
+          <a:p>
+            <a:pPr algn="l"/>
+            <a:r>
+              <a:rPr sz="1200" b="0">
+                <a:solidFill>
+                  <a:srgbClr val="3182F6"/>
+                </a:solidFill>
+                <a:latin typeface="Apple SD Gothic Neo"/>
+              </a:rPr>
+              <a:t>dnalabs.kr/signup</a:t>
+            </a:r>
+          </a:p>
+        </p:txBody>
+      </p:sp>
+      <p:sp>
+        <p:nvSpPr>
+          <p:cNvPr id="4" name="TextBox 3"/>
+          <p:cNvSpPr txBox="1"/>
+          <p:nvPr/>
+        </p:nvSpPr>
+        <p:spPr>
+          <a:xfrm>
+            <a:off x="566928" y="6053328"/>
+            <a:ext cx="11064240" cy="640080"/>
+          </a:xfrm>
+          <a:prstGeom prst="rect">
+            <a:avLst/>
+          </a:prstGeom>
+          <a:noFill/>
+        </p:spPr>
+        <p:txBody>
+          <a:bodyPr wrap="square" lIns="0" rIns="0" tIns="0" bIns="0">
+            <a:spAutoFit/>
+          </a:bodyPr>
+          <a:lstStyle/>
+          <a:p>
+            <a:pPr algn="l"/>
+            <a:r>
+              <a:rPr sz="1300" b="0">
+                <a:solidFill>
+                  <a:srgbClr val="6B7484"/>
+                </a:solidFill>
+                <a:latin typeface="Apple SD Gothic Neo"/>
+              </a:rPr>
+              <a:t>약관 동의와 카드 등록 단추가 있는 결제 직전 화면입니다. 이 화면 하단에도 같은 사업자 정보를 표시합니다.</a:t>
+            </a:r>
+          </a:p>
+        </p:txBody>
+      </p:sp>
+      <p:pic>
+        <p:nvPicPr>
+          <p:cNvPr id="5" name="Picture 4" descr="4b-결제화면하단.png"/>
+          <p:cNvPicPr>
+            <a:picLocks noChangeAspect="1"/>
+          </p:cNvPicPr>
+          <p:nvPr/>
+        </p:nvPicPr>
+        <p:blipFill>
+          <a:blip r:embed="rId2"/>
+          <a:stretch>
+            <a:fillRect/>
+          </a:stretch>
+        </p:blipFill>
+        <p:spPr>
+          <a:xfrm>
+            <a:off x="2779623" y="1234440"/>
+            <a:ext cx="6632448" cy="4663440"/>
+          </a:xfrm>
+          <a:prstGeom prst="rect">
+            <a:avLst/>
+          </a:prstGeom>
+        </p:spPr>
+      </p:pic>
+    </p:spTree>
+  </p:cSld>
+  <p:clrMapOvr>
+    <a:masterClrMapping/>
+  </p:clrMapOvr>
+</p:sld>
+</file>
+
+<file path=ppt/slides/slide8.xml><?xml version="1.0" encoding="utf-8"?>
+<p:sld xmlns:a="http://schemas.openxmlformats.org/drawingml/2006/main" xmlns:p="http://schemas.openxmlformats.org/presentationml/2006/main" xmlns:r="http://schemas.openxmlformats.org/officeDocument/2006/relationships">
+  <p:cSld>
+    <p:spTree>
+      <p:nvGrpSpPr>
+        <p:cNvPr id="1" name=""/>
+        <p:cNvGrpSpPr/>
+        <p:nvPr/>
+      </p:nvGrpSpPr>
+      <p:grpSpPr/>
+      <p:sp>
+        <p:nvSpPr>
+          <p:cNvPr id="2" name="TextBox 1"/>
+          <p:cNvSpPr txBox="1"/>
+          <p:nvPr/>
+        </p:nvSpPr>
+        <p:spPr>
+          <a:xfrm>
+            <a:off x="548640" y="320040"/>
+            <a:ext cx="8686800" cy="457200"/>
+          </a:xfrm>
+          <a:prstGeom prst="rect">
+            <a:avLst/>
+          </a:prstGeom>
+          <a:noFill/>
+        </p:spPr>
+        <p:txBody>
+          <a:bodyPr wrap="square" lIns="0" rIns="0" tIns="0" bIns="0">
+            <a:spAutoFit/>
+          </a:bodyPr>
+          <a:lstStyle/>
+          <a:p>
+            <a:pPr algn="l"/>
+            <a:r>
+              <a:rPr sz="2400" b="1">
+                <a:solidFill>
+                  <a:srgbClr val="0B1B33"/>
+                </a:solidFill>
+                <a:latin typeface="Apple SD Gothic Neo"/>
+              </a:rPr>
+              <a:t>⑦ 토스페이먼츠 결제창</a:t>
+            </a:r>
+          </a:p>
+        </p:txBody>
+      </p:sp>
+      <p:sp>
+        <p:nvSpPr>
+          <p:cNvPr id="3" name="TextBox 2"/>
+          <p:cNvSpPr txBox="1"/>
+          <p:nvPr/>
+        </p:nvSpPr>
+        <p:spPr>
+          <a:xfrm>
+            <a:off x="566928" y="841248"/>
+            <a:ext cx="8686800" cy="320040"/>
+          </a:xfrm>
+          <a:prstGeom prst="rect">
+            <a:avLst/>
+          </a:prstGeom>
+          <a:noFill/>
+        </p:spPr>
+        <p:txBody>
+          <a:bodyPr wrap="square" lIns="0" rIns="0" tIns="0" bIns="0">
+            <a:spAutoFit/>
+          </a:bodyPr>
+          <a:lstStyle/>
+          <a:p>
+            <a:pPr algn="l"/>
+            <a:r>
+              <a:rPr sz="1200" b="0">
+                <a:solidFill>
+                  <a:srgbClr val="3182F6"/>
+                </a:solidFill>
+                <a:latin typeface="Apple SD Gothic Neo"/>
+              </a:rPr>
+              <a:t>js.tosspayments.com</a:t>
+            </a:r>
+          </a:p>
+        </p:txBody>
+      </p:sp>
+      <p:sp>
+        <p:nvSpPr>
+          <p:cNvPr id="4" name="TextBox 3"/>
+          <p:cNvSpPr txBox="1"/>
+          <p:nvPr/>
+        </p:nvSpPr>
+        <p:spPr>
+          <a:xfrm>
+            <a:off x="566928" y="6053328"/>
+            <a:ext cx="11064240" cy="640080"/>
+          </a:xfrm>
+          <a:prstGeom prst="rect">
+            <a:avLst/>
+          </a:prstGeom>
+          <a:noFill/>
+        </p:spPr>
+        <p:txBody>
+          <a:bodyPr wrap="square" lIns="0" rIns="0" tIns="0" bIns="0">
+            <a:spAutoFit/>
+          </a:bodyPr>
+          <a:lstStyle/>
+          <a:p>
+            <a:pPr algn="l"/>
+            <a:r>
+              <a:rPr sz="1300" b="0">
+                <a:solidFill>
+                  <a:srgbClr val="6B7484"/>
+                </a:solidFill>
+                <a:latin typeface="Apple SD Gothic Neo"/>
+              </a:rPr>
+              <a:t>카드 정보는 토스페이먼츠 결제창에서만 입력받습니다. 당사는 카드번호를 받지도, 저장하지도 않습니다. 빌링키만 돌려받습니다.</a:t>
+            </a:r>
+          </a:p>
+        </p:txBody>
+      </p:sp>
+      <p:pic>
+        <p:nvPicPr>
+          <p:cNvPr id="5" name="Picture 4" descr="5-토스결제창.png"/>
+          <p:cNvPicPr>
+            <a:picLocks noChangeAspect="1"/>
+          </p:cNvPicPr>
+          <p:nvPr/>
+        </p:nvPicPr>
+        <p:blipFill>
+          <a:blip r:embed="rId2"/>
+          <a:stretch>
+            <a:fillRect/>
+          </a:stretch>
+        </p:blipFill>
+        <p:spPr>
+          <a:xfrm>
+            <a:off x="2779623" y="1234440"/>
+            <a:ext cx="6632448" cy="4663440"/>
+          </a:xfrm>
+          <a:prstGeom prst="rect">
+            <a:avLst/>
+          </a:prstGeom>
+        </p:spPr>
+      </p:pic>
+    </p:spTree>
+  </p:cSld>
+  <p:clrMapOvr>
+    <a:masterClrMapping/>
+  </p:clrMapOvr>
+</p:sld>
+</file>
+
+<file path=ppt/slides/slide9.xml><?xml version="1.0" encoding="utf-8"?>
+<p:sld xmlns:a="http://schemas.openxmlformats.org/drawingml/2006/main" xmlns:p="http://schemas.openxmlformats.org/presentationml/2006/main" xmlns:r="http://schemas.openxmlformats.org/officeDocument/2006/relationships">
+  <p:cSld>
+    <p:spTree>
+      <p:nvGrpSpPr>
+        <p:cNvPr id="1" name=""/>
+        <p:cNvGrpSpPr/>
+        <p:nvPr/>
+      </p:nvGrpSpPr>
+      <p:grpSpPr/>
+      <p:sp>
+        <p:nvSpPr>
+          <p:cNvPr id="2" name="TextBox 1"/>
+          <p:cNvSpPr txBox="1"/>
+          <p:nvPr/>
+        </p:nvSpPr>
+        <p:spPr>
+          <a:xfrm>
+            <a:off x="548640" y="320040"/>
+            <a:ext cx="8686800" cy="457200"/>
+          </a:xfrm>
+          <a:prstGeom prst="rect">
+            <a:avLst/>
+          </a:prstGeom>
+          <a:noFill/>
+        </p:spPr>
+        <p:txBody>
+          <a:bodyPr wrap="square" lIns="0" rIns="0" tIns="0" bIns="0">
+            <a:spAutoFit/>
+          </a:bodyPr>
+          <a:lstStyle/>
+          <a:p>
+            <a:pPr algn="l"/>
+            <a:r>
+              <a:rPr sz="2400" b="1">
+                <a:solidFill>
+                  <a:srgbClr val="0B1B33"/>
+                </a:solidFill>
+                <a:latin typeface="Apple SD Gothic Neo"/>
+              </a:rPr>
+              <a:t>⑧ 가입 완료</a:t>
             </a:r>
           </a:p>
         </p:txBody>
